--- a/public/fun/pack/pptx/weddingpro/결혼식프리미엄_24_오시는길중심_코랄샌드.pptx
+++ b/public/fun/pack/pptx/weddingpro/결혼식프리미엄_24_오시는길중심_코랄샌드.pptx
@@ -113,12 +113,12 @@
   <p:extLst>
     <p:ext uri="{521415D9-36F7-43E2-AB2F-B90AF26B5E84}">
       <p14:sectionLst xmlns:p14="http://schemas.microsoft.com/office/powerpoint/2010/main">
-        <p14:section name="시작" id="{387B8B45-2EDE-4DF7-9F81-0C3CFAFE19C7}">
+        <p14:section name="시작" id="{8904ADA4-1F17-472C-9459-290A12A3E14F}">
           <p14:sldIdLst>
             <p14:sldId id="256"/>
           </p14:sldIdLst>
         </p14:section>
-        <p14:section name="본문" id="{61F78EC0-8CA6-415B-953F-71097E260243}">
+        <p14:section name="본문" id="{716B1D3F-71B3-4B87-8E9F-EDAAEE0B641C}">
           <p14:sldIdLst>
             <p14:sldId id="257"/>
             <p14:sldId id="258"/>
@@ -127,7 +127,7 @@
             <p14:sldId id="261"/>
           </p14:sldIdLst>
         </p14:section>
-        <p14:section name="마무리" id="{311A73C7-E442-43C8-8DC4-02F9134DED87}">
+        <p14:section name="마무리" id="{70C8ADCF-ED7C-452B-B428-994A41513AF0}">
           <p14:sldIdLst>
             <p14:sldId id="262"/>
           </p14:sldIdLst>
@@ -1567,7 +1567,7 @@
             </a:lvl1pPr>
           </a:lstStyle>
           <a:p>
-            <a:fld id="{DE564C99-BC96-4BC5-8388-31D0FEBCD20E}" type="slidenum">
+            <a:fld id="{1560699E-41A4-414F-A8B6-5BA880617B96}" type="slidenum">
               <a:rPr lang="en-US"/>
               <a:t>‹#›</a:t>
             </a:fld>
@@ -2223,7 +2223,7 @@
             </a:lvl1pPr>
           </a:lstStyle>
           <a:p>
-            <a:fld id="{4AAD12EC-ADE4-4CCE-B88F-AF4FEFD2E069}" type="slidenum">
+            <a:fld id="{FAA6FAC6-0F30-4FEC-8C4D-799C3B28667E}" type="slidenum">
               <a:rPr lang="en-US"/>
               <a:t>‹#›</a:t>
             </a:fld>
@@ -2860,7 +2860,7 @@
             </a:lvl1pPr>
           </a:lstStyle>
           <a:p>
-            <a:fld id="{B0C67A26-BDA9-43AC-A723-EF1CB7DDD7AF}" type="slidenum">
+            <a:fld id="{81F3B388-DBE3-41EE-AB1D-6FEF3AD504A2}" type="slidenum">
               <a:rPr lang="en-US"/>
               <a:t>‹#›</a:t>
             </a:fld>
@@ -3721,7 +3721,7 @@
           <a:p>
             <a:r>
               <a:rPr lang="ko-KR"/>
-              <a:t>비 오면 우산이 필요한 길입니다</a:t>
+              <a:t>정문까지 걸어서 이 분 거리입니다</a:t>
             </a:r>
           </a:p>
         </p:txBody>
@@ -3749,7 +3749,7 @@
           <a:p>
             <a:r>
               <a:rPr lang="ko-KR"/>
-              <a:t>0000. 00. 00 · 예식장 이름</a:t>
+              <a:t>날짜 입력 · 예식장 이름</a:t>
             </a:r>
           </a:p>
         </p:txBody>
@@ -3972,7 +3972,7 @@
           <a:bodyPr/>
           <a:lstStyle/>
           <a:p>
-            <a:fld id="{91C11857-5772-4ABE-A0C0-454310F53264}" type="slidenum">
+            <a:fld id="{4C5C5315-13EF-4829-84B8-1DDEF3DFBF65}" type="slidenum">
               <a:rPr lang="en-US"/>
               <a:t>‹#›</a:t>
             </a:fld>
@@ -4450,7 +4450,7 @@
           <a:bodyPr/>
           <a:lstStyle/>
           <a:p>
-            <a:fld id="{C9813C7F-7120-4A04-9EAA-48C74295A1B1}" type="slidenum">
+            <a:fld id="{0D3D5F13-1BB3-45A0-92CF-248537E32D67}" type="slidenum">
               <a:rPr lang="en-US"/>
               <a:t>‹#›</a:t>
             </a:fld>
@@ -4888,7 +4888,7 @@
           <a:bodyPr/>
           <a:lstStyle/>
           <a:p>
-            <a:fld id="{61ECC6D3-3047-4580-AA98-2A8900C22232}" type="slidenum">
+            <a:fld id="{7C3D1DA1-F530-4A93-B1CF-A466EEF51882}" type="slidenum">
               <a:rPr lang="en-US"/>
               <a:t>‹#›</a:t>
             </a:fld>
@@ -6182,7 +6182,7 @@
           <a:bodyPr/>
           <a:lstStyle/>
           <a:p>
-            <a:fld id="{D7121436-7F79-4597-BF84-B3112050FC44}" type="slidenum">
+            <a:fld id="{1A38B38A-6AD4-4AC0-9081-1AC0FF30355B}" type="slidenum">
               <a:rPr lang="en-US"/>
               <a:t>‹#›</a:t>
             </a:fld>
@@ -6270,7 +6270,7 @@
           <a:bodyPr/>
           <a:lstStyle/>
           <a:p>
-            <a:fld id="{BE03C584-254C-4A1F-A8E6-EB0E7E6AE2BA}" type="slidenum">
+            <a:fld id="{9C3D9F0D-820F-4A35-B9B8-24F2C69E8BAC}" type="slidenum">
               <a:rPr lang="en-US"/>
               <a:t>‹#›</a:t>
             </a:fld>
